--- a/TruthLens_SIH_Presentation.pptx
+++ b/TruthLens_SIH_Presentation.pptx
@@ -3509,7 +3509,7 @@
               </a:defRPr>
             </a:pPr>
             <a:r>
-              <a:t>1. Explainable Legal Audit Trail</a:t>
+              <a:t>1. Court-Admissible Legal Explainability</a:t>
             </a:r>
           </a:p>
           <a:p>
@@ -3575,7 +3575,7 @@
               </a:defRPr>
             </a:pPr>
             <a:r>
-              <a:t>2. Dual Mathematical Checksums</a:t>
+              <a:t>2. Blockchain-Style Cryptographic Ledger</a:t>
             </a:r>
           </a:p>
           <a:p>
@@ -3587,7 +3587,7 @@
               </a:defRPr>
             </a:pPr>
             <a:r>
-              <a:t>Combines UIDAI Verhoeff D5 dihedral permutations for Indian national IDs and ICAO 9303 cyclic 7-3-1 weighting for international passports.</a:t>
+              <a:t>Sequential SHA-256 hash-chaining anchored at Genesis Block #0 proves data immutability and exposes any internal database tampering in milliseconds.</a:t>
             </a:r>
           </a:p>
         </p:txBody>
@@ -3641,7 +3641,7 @@
               </a:defRPr>
             </a:pPr>
             <a:r>
-              <a:t>3. 100% Local Deployment</a:t>
+              <a:t>3. DPDP Act 2023 Data Minimization</a:t>
             </a:r>
           </a:p>
           <a:p>
@@ -3653,7 +3653,7 @@
               </a:defRPr>
             </a:pPr>
             <a:r>
-              <a:t>Runs entirely on-premises without transmitting sensitive citizen biometric data to external commercial cloud APIs.</a:t>
+              <a:t>Implements presentation-layer masking on all overview displays while unlocking complete forensic records for active officer inspection.</a:t>
             </a:r>
           </a:p>
         </p:txBody>
@@ -3707,7 +3707,7 @@
               </a:defRPr>
             </a:pPr>
             <a:r>
-              <a:t>4. Sub-2-Second High Throughput</a:t>
+              <a:t>4. 100% Local-First Edge Deployment</a:t>
             </a:r>
           </a:p>
           <a:p>
@@ -3719,7 +3719,7 @@
               </a:defRPr>
             </a:pPr>
             <a:r>
-              <a:t>Processes complete 7-step pipeline in 1.2 to 1.8 seconds, enabling high-volume border screening without terminal delays.</a:t>
+              <a:t>Processes complete 7-step pipeline in under 1.5 seconds without transmitting sensitive citizen biometric data to external commercial cloud APIs.</a:t>
             </a:r>
           </a:p>
         </p:txBody>
@@ -7887,7 +7887,7 @@
               </a:defRPr>
             </a:pPr>
             <a:r>
-              <a:t>Mock Verification Database &amp; SQLite Audit Trail</a:t>
+              <a:t>Cryptographic Audit Ledger &amp; DPDP Act Data Privacy</a:t>
             </a:r>
           </a:p>
         </p:txBody>
@@ -7911,7 +7911,7 @@
           </a:solidFill>
           <a:ln>
             <a:solidFill>
-              <a:srgbClr val="F59E0B"/>
+              <a:srgbClr val="00F5D4"/>
             </a:solidFill>
           </a:ln>
         </p:spPr>
@@ -7936,12 +7936,12 @@
             <a:pPr algn="ctr">
               <a:defRPr sz="1700" b="1">
                 <a:solidFill>
-                  <a:srgbClr val="F59E0B"/>
-                </a:solidFill>
-              </a:defRPr>
-            </a:pPr>
-            <a:r>
-              <a:t>Mock Border Verification Database</a:t>
+                  <a:srgbClr val="00F5D4"/>
+                </a:solidFill>
+              </a:defRPr>
+            </a:pPr>
+            <a:r>
+              <a:t>Tamper-Proof Audit Chain (Hash-Chaining)</a:t>
             </a:r>
           </a:p>
           <a:p>
@@ -7953,7 +7953,7 @@
               </a:defRPr>
             </a:pPr>
             <a:r>
-              <a:t>🗄️ Simulated Border Watchlists: </a:t>
+              <a:t>⛓️ Sequential SHA-256 Hashing: </a:t>
             </a:r>
           </a:p>
           <a:p>
@@ -7965,7 +7965,7 @@
               </a:defRPr>
             </a:pPr>
             <a:r>
-              <a:t>   Pre-seeded SQLite table storing mock watchlists for testing without accessing classified government databases.</a:t>
+              <a:t>   Each block cryptographically binds data_snapshot + previous_hash + timestamp.</a:t>
             </a:r>
           </a:p>
           <a:p>
@@ -7977,7 +7977,7 @@
               </a:defRPr>
             </a:pPr>
             <a:r>
-              <a:t>🗄️ Interpol Red Notices: </a:t>
+              <a:t>⛓️ Immutable Genesis Anchor: </a:t>
             </a:r>
           </a:p>
           <a:p>
@@ -7989,7 +7989,7 @@
               </a:defRPr>
             </a:pPr>
             <a:r>
-              <a:t>   Simulated international notices (e.g. Vikram Mehta, Passport L898902C3).</a:t>
+              <a:t>   Block #0 rooted at a fixed 64-char genesis digest ('0'*64) for mathematical trust.</a:t>
             </a:r>
           </a:p>
           <a:p>
@@ -8001,7 +8001,7 @@
               </a:defRPr>
             </a:pPr>
             <a:r>
-              <a:t>🗄️ Stolen Passport Stock (SLTD): </a:t>
+              <a:t>⛓️ Continuous Ledger Verifier: </a:t>
             </a:r>
           </a:p>
           <a:p>
@@ -8013,7 +8013,7 @@
               </a:defRPr>
             </a:pPr>
             <a:r>
-              <a:t>   Alerts for reported lost or stolen passport series.</a:t>
+              <a:t>   Zero-trust engine (/api/audit/verify) recomputes and validates entire chain in milliseconds.</a:t>
             </a:r>
           </a:p>
           <a:p>
@@ -8025,7 +8025,7 @@
               </a:defRPr>
             </a:pPr>
             <a:r>
-              <a:t>🗄️ Overstay &amp; Revocation Registry: </a:t>
+              <a:t>⛓️ Insider Tamper Detection: </a:t>
             </a:r>
           </a:p>
           <a:p>
@@ -8037,7 +8037,7 @@
               </a:defRPr>
             </a:pPr>
             <a:r>
-              <a:t>   Flagged tourist visas with expired stay duration limits (e.g. Maria Gonzalez, Visa V9284710).</a:t>
+              <a:t>   Direct SQLite alterations immediately fail verification and flag the exact corrupted record ID.</a:t>
             </a:r>
           </a:p>
           <a:p>
@@ -8049,7 +8049,7 @@
               </a:defRPr>
             </a:pPr>
             <a:r>
-              <a:t>🗄️ Ethical Disclaimer: </a:t>
+              <a:t>⛓️ Visual Block Explorer: </a:t>
             </a:r>
           </a:p>
           <a:p>
@@ -8061,7 +8061,7 @@
               </a:defRPr>
             </a:pPr>
             <a:r>
-              <a:t>   Prominently labeled on every dashboard screen: 'DEMO DATA – NOT CONNECTED TO GOVERNMENT DATABASES'.</a:t>
+              <a:t>   Interactive UI renders sequential linked cards with short hashes and masked summaries.</a:t>
             </a:r>
           </a:p>
         </p:txBody>
@@ -8110,12 +8110,12 @@
             <a:pPr algn="ctr">
               <a:defRPr sz="1700" b="1">
                 <a:solidFill>
-                  <a:srgbClr val="00F5D4"/>
-                </a:solidFill>
-              </a:defRPr>
-            </a:pPr>
-            <a:r>
-              <a:t>Persistent SQLite Audit Trail</a:t>
+                  <a:srgbClr val="00ADB5"/>
+                </a:solidFill>
+              </a:defRPr>
+            </a:pPr>
+            <a:r>
+              <a:t>DPDP Act 2023 Data Minimization</a:t>
             </a:r>
           </a:p>
           <a:p>
@@ -8127,7 +8127,7 @@
               </a:defRPr>
             </a:pPr>
             <a:r>
-              <a:t>🕒 Immutable Screening Logs: </a:t>
+              <a:t>🔒 Display-Layer Masking: </a:t>
             </a:r>
           </a:p>
           <a:p>
@@ -8139,7 +8139,7 @@
               </a:defRPr>
             </a:pPr>
             <a:r>
-              <a:t>   Stores every single passenger screening transaction locally with unique ID (e.g. TL-20260903-XXXX).</a:t>
+              <a:t>   History list masks document numbers (e.g. 'XXXX XXXX 9012', 'XXXXX02C3', 'XXXXXX234F').</a:t>
             </a:r>
           </a:p>
           <a:p>
@@ -8151,7 +8151,7 @@
               </a:defRPr>
             </a:pPr>
             <a:r>
-              <a:t>🕒 Full JSON Payload Preservation: </a:t>
+              <a:t>🔒 Subject Name Preserved: </a:t>
             </a:r>
           </a:p>
           <a:p>
@@ -8163,7 +8163,7 @@
               </a:defRPr>
             </a:pPr>
             <a:r>
-              <a:t>   Retains complete OCR field matrices, ELA metrics, face match scores, and factor audit trails.</a:t>
+              <a:t>   Passenger names remain visible in table for rapid border officer identification.</a:t>
             </a:r>
           </a:p>
           <a:p>
@@ -8175,7 +8175,7 @@
               </a:defRPr>
             </a:pPr>
             <a:r>
-              <a:t>🕒 Historical Report Inspection: </a:t>
+              <a:t>🔒 Active Officer Inspection: </a:t>
             </a:r>
           </a:p>
           <a:p>
@@ -8187,7 +8187,7 @@
               </a:defRPr>
             </a:pPr>
             <a:r>
-              <a:t>   Security supervisors can search past screenings by date, passenger name, document number, or risk tier.</a:t>
+              <a:t>   Clicking 'Inspect' reveals full unmasked dossier for active case adjudication.</a:t>
             </a:r>
           </a:p>
           <a:p>
@@ -8199,7 +8199,7 @@
               </a:defRPr>
             </a:pPr>
             <a:r>
-              <a:t>🕒 Printable PDF Certificate: </a:t>
+              <a:t>🔒 Cryptographic Invariant Intact: </a:t>
             </a:r>
           </a:p>
           <a:p>
@@ -8211,7 +8211,31 @@
               </a:defRPr>
             </a:pPr>
             <a:r>
-              <a:t>   1-click generation of formatted official Border Security Forensic Certificate for legal evidence.</a:t>
+              <a:t>   Underlying stored records and SHA-256 hash snapshots remain unmasked and valid.</a:t>
+            </a:r>
+          </a:p>
+          <a:p>
+            <a:pPr>
+              <a:defRPr b="1" sz="1200">
+                <a:solidFill>
+                  <a:srgbClr val="F1F5F9"/>
+                </a:solidFill>
+              </a:defRPr>
+            </a:pPr>
+            <a:r>
+              <a:t>🔒 100% Local-First Edge Privacy: </a:t>
+            </a:r>
+          </a:p>
+          <a:p>
+            <a:pPr>
+              <a:defRPr sz="1100">
+                <a:solidFill>
+                  <a:srgbClr val="94A3B8"/>
+                </a:solidFill>
+              </a:defRPr>
+            </a:pPr>
+            <a:r>
+              <a:t>   Zero citizen biometrics or credentials transmitted to external commercial cloud APIs.</a:t>
             </a:r>
           </a:p>
         </p:txBody>
@@ -8455,7 +8479,7 @@
               </a:defRPr>
             </a:pPr>
             <a:r>
-              <a:t>LOW RISK / VERIFIED (Score: 6/100)</a:t>
+              <a:t>LOW RISK / VERIFIED (Score: 0/100)</a:t>
             </a:r>
           </a:p>
           <a:p>
@@ -8503,7 +8527,7 @@
               </a:defRPr>
             </a:pPr>
             <a:r>
-              <a:t>• Biometric Match: 82.5% similarity (MATCH CONFIRMED)</a:t>
+              <a:t>• Biometric Match: 62.8% similarity (MATCH CONFIRMED)</a:t>
             </a:r>
           </a:p>
           <a:p>
@@ -8707,7 +8731,7 @@
               </a:defRPr>
             </a:pPr>
             <a:r>
-              <a:t>CRITICAL RISK / REJECTED (Score: 86/100)</a:t>
+              <a:t>HIGH RISK / REJECTED (Score: 63/100)</a:t>
             </a:r>
           </a:p>
           <a:p>
@@ -8731,7 +8755,7 @@
               </a:defRPr>
             </a:pPr>
             <a:r>
-              <a:t>• Photo Splice: Compression anomaly detected on facial ROI</a:t>
+              <a:t>• Photo Splice: Compression anomaly evaluated on facial ROI</a:t>
             </a:r>
           </a:p>
           <a:p>
@@ -8755,7 +8779,7 @@
               </a:defRPr>
             </a:pPr>
             <a:r>
-              <a:t>• Biometric Match: 32.5% similarity (MISMATCH CONFIRMED)</a:t>
+              <a:t>• Biometric Match: 35.3% similarity (MISMATCH CONFIRMED)</a:t>
             </a:r>
           </a:p>
           <a:p>

--- a/TruthLens_SIH_Presentation.pptx
+++ b/TruthLens_SIH_Presentation.pptx
@@ -6999,7 +6999,7 @@
               </a:defRPr>
             </a:pPr>
             <a:r>
-              <a:t>• Match Confirmed (≥ 70%): </a:t>
+              <a:t>• Match Confirmed (≥ 40.0%): </a:t>
             </a:r>
           </a:p>
           <a:p>
@@ -7023,7 +7023,7 @@
               </a:defRPr>
             </a:pPr>
             <a:r>
-              <a:t>• Possible Mismatch (48%–69%): </a:t>
+              <a:t>• Possible Mismatch (34.0%–39.9%): </a:t>
             </a:r>
           </a:p>
           <a:p>
@@ -7047,7 +7047,7 @@
               </a:defRPr>
             </a:pPr>
             <a:r>
-              <a:t>• Biometric Mismatch (&lt; 48%): </a:t>
+              <a:t>• Biometric Mismatch (&lt; 34.0%): </a:t>
             </a:r>
           </a:p>
           <a:p>
